--- a/Автогенератор справок налоговый вычет.pptx
+++ b/Автогенератор справок налоговый вычет.pptx
@@ -9093,7 +9093,7 @@
       </p:sp>
       <p:sp>
         <p:nvSpPr>
-          <p:cNvPr id="12" name="Rectangle 11"/>
+          <p:cNvPr id="17" name="Rectangle 16"/>
           <p:cNvSpPr/>
           <p:nvPr/>
         </p:nvSpPr>
@@ -9137,7 +9137,7 @@
       </p:sp>
       <p:sp>
         <p:nvSpPr>
-          <p:cNvPr id="13" name="Rectangle 12"/>
+          <p:cNvPr id="18" name="Rectangle 17"/>
           <p:cNvSpPr/>
           <p:nvPr/>
         </p:nvSpPr>
@@ -9181,7 +9181,7 @@
       </p:sp>
       <p:sp>
         <p:nvSpPr>
-          <p:cNvPr id="14" name="Rectangle 13"/>
+          <p:cNvPr id="19" name="Rectangle 18"/>
           <p:cNvSpPr/>
           <p:nvPr/>
         </p:nvSpPr>
@@ -9225,7 +9225,7 @@
       </p:sp>
       <p:sp>
         <p:nvSpPr>
-          <p:cNvPr id="15" name="TextBox 14"/>
+          <p:cNvPr id="20" name="TextBox 19"/>
           <p:cNvSpPr txBox="1"/>
           <p:nvPr/>
         </p:nvSpPr>
@@ -9253,15 +9253,14 @@
                 </a:solidFill>
                 <a:latin typeface="Calibri"/>
               </a:rPr>
-              <a:t>Claude API
-(Anthropic SDK)</a:t>
-            </a:r>
-          </a:p>
-        </p:txBody>
-      </p:sp>
-      <p:sp>
-        <p:nvSpPr>
-          <p:cNvPr id="16" name="TextBox 15"/>
+              <a:t>ReportLab</a:t>
+            </a:r>
+          </a:p>
+        </p:txBody>
+      </p:sp>
+      <p:sp>
+        <p:nvSpPr>
+          <p:cNvPr id="21" name="TextBox 20"/>
           <p:cNvSpPr txBox="1"/>
           <p:nvPr/>
         </p:nvSpPr>
@@ -9289,16 +9288,16 @@
                 </a:solidFill>
                 <a:latin typeface="Calibri"/>
               </a:rPr>
-              <a:t>Обработка данных анкеты,
-логика заполнения полей,
-проверка корректности.</a:t>
-            </a:r>
-          </a:p>
-        </p:txBody>
-      </p:sp>
-      <p:sp>
-        <p:nvSpPr>
-          <p:cNvPr id="17" name="Rectangle 16"/>
+              <a:t>Генерация PDF-документов.
+Вёрстка справки по
+официальной форме.</a:t>
+            </a:r>
+          </a:p>
+        </p:txBody>
+      </p:sp>
+      <p:sp>
+        <p:nvSpPr>
+          <p:cNvPr id="22" name="Rectangle 21"/>
           <p:cNvSpPr/>
           <p:nvPr/>
         </p:nvSpPr>
@@ -9342,7 +9341,7 @@
       </p:sp>
       <p:sp>
         <p:nvSpPr>
-          <p:cNvPr id="18" name="Rectangle 17"/>
+          <p:cNvPr id="23" name="Rectangle 22"/>
           <p:cNvSpPr/>
           <p:nvPr/>
         </p:nvSpPr>
@@ -9386,7 +9385,7 @@
       </p:sp>
       <p:sp>
         <p:nvSpPr>
-          <p:cNvPr id="19" name="Rectangle 18"/>
+          <p:cNvPr id="24" name="Rectangle 23"/>
           <p:cNvSpPr/>
           <p:nvPr/>
         </p:nvSpPr>
@@ -9430,7 +9429,7 @@
       </p:sp>
       <p:sp>
         <p:nvSpPr>
-          <p:cNvPr id="20" name="TextBox 19"/>
+          <p:cNvPr id="25" name="TextBox 24"/>
           <p:cNvSpPr txBox="1"/>
           <p:nvPr/>
         </p:nvSpPr>
@@ -9458,210 +9457,6 @@
                 </a:solidFill>
                 <a:latin typeface="Calibri"/>
               </a:rPr>
-              <a:t>ReportLab</a:t>
-            </a:r>
-          </a:p>
-        </p:txBody>
-      </p:sp>
-      <p:sp>
-        <p:nvSpPr>
-          <p:cNvPr id="21" name="TextBox 20"/>
-          <p:cNvSpPr txBox="1"/>
-          <p:nvPr/>
-        </p:nvSpPr>
-        <p:spPr>
-          <a:xfrm>
-            <a:off x="6355080" y="2971800"/>
-            <a:ext cx="2423160" cy="2743200"/>
-          </a:xfrm>
-          <a:prstGeom prst="rect">
-            <a:avLst/>
-          </a:prstGeom>
-          <a:noFill/>
-        </p:spPr>
-        <p:txBody>
-          <a:bodyPr wrap="square">
-            <a:spAutoFit/>
-          </a:bodyPr>
-          <a:lstStyle/>
-          <a:p>
-            <a:pPr algn="l"/>
-            <a:r>
-              <a:rPr sz="1300" b="0">
-                <a:solidFill>
-                  <a:srgbClr val="444455"/>
-                </a:solidFill>
-                <a:latin typeface="Calibri"/>
-              </a:rPr>
-              <a:t>Генерация PDF-документов.
-Вёрстка справки по
-официальной форме.</a:t>
-            </a:r>
-          </a:p>
-        </p:txBody>
-      </p:sp>
-      <p:sp>
-        <p:nvSpPr>
-          <p:cNvPr id="22" name="Rectangle 21"/>
-          <p:cNvSpPr/>
-          <p:nvPr/>
-        </p:nvSpPr>
-        <p:spPr>
-          <a:xfrm>
-            <a:off x="9144000" y="1645920"/>
-            <a:ext cx="2651760" cy="4389120"/>
-          </a:xfrm>
-          <a:prstGeom prst="rect">
-            <a:avLst/>
-          </a:prstGeom>
-          <a:solidFill>
-            <a:srgbClr val="D9E8F7"/>
-          </a:solidFill>
-          <a:ln>
-            <a:noFill/>
-          </a:ln>
-        </p:spPr>
-        <p:style>
-          <a:lnRef idx="1">
-            <a:schemeClr val="accent1"/>
-          </a:lnRef>
-          <a:fillRef idx="3">
-            <a:schemeClr val="accent1"/>
-          </a:fillRef>
-          <a:effectRef idx="2">
-            <a:schemeClr val="accent1"/>
-          </a:effectRef>
-          <a:fontRef idx="minor">
-            <a:schemeClr val="lt1"/>
-          </a:fontRef>
-        </p:style>
-        <p:txBody>
-          <a:bodyPr rtlCol="0" anchor="ctr"/>
-          <a:lstStyle/>
-          <a:p>
-            <a:pPr algn="ctr"/>
-            <a:endParaRPr/>
-          </a:p>
-        </p:txBody>
-      </p:sp>
-      <p:sp>
-        <p:nvSpPr>
-          <p:cNvPr id="23" name="Rectangle 22"/>
-          <p:cNvSpPr/>
-          <p:nvPr/>
-        </p:nvSpPr>
-        <p:spPr>
-          <a:xfrm>
-            <a:off x="9144000" y="1645920"/>
-            <a:ext cx="2651760" cy="73152"/>
-          </a:xfrm>
-          <a:prstGeom prst="rect">
-            <a:avLst/>
-          </a:prstGeom>
-          <a:solidFill>
-            <a:srgbClr val="256EBF"/>
-          </a:solidFill>
-          <a:ln>
-            <a:noFill/>
-          </a:ln>
-        </p:spPr>
-        <p:style>
-          <a:lnRef idx="1">
-            <a:schemeClr val="accent1"/>
-          </a:lnRef>
-          <a:fillRef idx="3">
-            <a:schemeClr val="accent1"/>
-          </a:fillRef>
-          <a:effectRef idx="2">
-            <a:schemeClr val="accent1"/>
-          </a:effectRef>
-          <a:fontRef idx="minor">
-            <a:schemeClr val="lt1"/>
-          </a:fontRef>
-        </p:style>
-        <p:txBody>
-          <a:bodyPr rtlCol="0" anchor="ctr"/>
-          <a:lstStyle/>
-          <a:p>
-            <a:pPr algn="ctr"/>
-            <a:endParaRPr/>
-          </a:p>
-        </p:txBody>
-      </p:sp>
-      <p:sp>
-        <p:nvSpPr>
-          <p:cNvPr id="24" name="Rectangle 23"/>
-          <p:cNvSpPr/>
-          <p:nvPr/>
-        </p:nvSpPr>
-        <p:spPr>
-          <a:xfrm>
-            <a:off x="9281160" y="1828800"/>
-            <a:ext cx="2377440" cy="1005840"/>
-          </a:xfrm>
-          <a:prstGeom prst="rect">
-            <a:avLst/>
-          </a:prstGeom>
-          <a:solidFill>
-            <a:srgbClr val="256EBF"/>
-          </a:solidFill>
-          <a:ln>
-            <a:noFill/>
-          </a:ln>
-        </p:spPr>
-        <p:style>
-          <a:lnRef idx="1">
-            <a:schemeClr val="accent1"/>
-          </a:lnRef>
-          <a:fillRef idx="3">
-            <a:schemeClr val="accent1"/>
-          </a:fillRef>
-          <a:effectRef idx="2">
-            <a:schemeClr val="accent1"/>
-          </a:effectRef>
-          <a:fontRef idx="minor">
-            <a:schemeClr val="lt1"/>
-          </a:fontRef>
-        </p:style>
-        <p:txBody>
-          <a:bodyPr rtlCol="0" anchor="ctr"/>
-          <a:lstStyle/>
-          <a:p>
-            <a:pPr algn="ctr"/>
-            <a:endParaRPr/>
-          </a:p>
-        </p:txBody>
-      </p:sp>
-      <p:sp>
-        <p:nvSpPr>
-          <p:cNvPr id="25" name="TextBox 24"/>
-          <p:cNvSpPr txBox="1"/>
-          <p:nvPr/>
-        </p:nvSpPr>
-        <p:spPr>
-          <a:xfrm>
-            <a:off x="9281160" y="1920240"/>
-            <a:ext cx="2377440" cy="822960"/>
-          </a:xfrm>
-          <a:prstGeom prst="rect">
-            <a:avLst/>
-          </a:prstGeom>
-          <a:noFill/>
-        </p:spPr>
-        <p:txBody>
-          <a:bodyPr wrap="square">
-            <a:spAutoFit/>
-          </a:bodyPr>
-          <a:lstStyle/>
-          <a:p>
-            <a:pPr algn="ctr"/>
-            <a:r>
-              <a:rPr sz="1500" b="1">
-                <a:solidFill>
-                  <a:srgbClr val="FFFFFF"/>
-                </a:solidFill>
-                <a:latin typeface="Calibri"/>
-              </a:rPr>
               <a:t>Структурированная
 анкета</a:t>
             </a:r>
@@ -9676,7 +9471,7 @@
         </p:nvSpPr>
         <p:spPr>
           <a:xfrm>
-            <a:off x="9281160" y="2971800"/>
+            <a:off x="6355080" y="2971800"/>
             <a:ext cx="2423160" cy="2743200"/>
           </a:xfrm>
           <a:prstGeom prst="rect">
